--- a/temp/files/T5-temp.pptx
+++ b/temp/files/T5-temp.pptx
@@ -16,6 +16,7 @@
     <p:sldId id="264" r:id="rId15"/>
     <p:sldId id="265" r:id="rId16"/>
     <p:sldId id="266" r:id="rId17"/>
+    <p:sldId id="267" r:id="rId18"/>
   </p:sldIdLst>
   <p:sldSz cx="12191695" cy="6858000" type="screen4x3"/>
   <p:notesSz cx="6858000" cy="9144000"/>
@@ -3290,8 +3291,8 @@
         </p:blipFill>
         <p:spPr>
           <a:xfrm>
-            <a:off x="426709" y="1417284"/>
-            <a:ext cx="11338276" cy="1356326"/>
+            <a:off x="426709" y="1341086"/>
+            <a:ext cx="11338276" cy="1737316"/>
           </a:xfrm>
           <a:prstGeom prst="rect">
             <a:avLst/>
@@ -3314,8 +3315,8 @@
         </p:blipFill>
         <p:spPr>
           <a:xfrm>
-            <a:off x="3703227" y="1645878"/>
-            <a:ext cx="1432524" cy="822939"/>
+            <a:off x="10180065" y="1645878"/>
+            <a:ext cx="1356326" cy="1127731"/>
           </a:xfrm>
           <a:prstGeom prst="rect">
             <a:avLst/>
@@ -3338,8 +3339,8 @@
         </p:blipFill>
         <p:spPr>
           <a:xfrm>
-            <a:off x="426709" y="2712652"/>
-            <a:ext cx="11338276" cy="1356326"/>
+            <a:off x="426709" y="2865048"/>
+            <a:ext cx="11338276" cy="1737316"/>
           </a:xfrm>
           <a:prstGeom prst="rect">
             <a:avLst/>
@@ -3362,8 +3363,8 @@
         </p:blipFill>
         <p:spPr>
           <a:xfrm>
-            <a:off x="3627029" y="2941246"/>
-            <a:ext cx="822939" cy="822939"/>
+            <a:off x="9494282" y="3093642"/>
+            <a:ext cx="2042108" cy="1203929"/>
           </a:xfrm>
           <a:prstGeom prst="rect">
             <a:avLst/>
@@ -3386,8 +3387,8 @@
         </p:blipFill>
         <p:spPr>
           <a:xfrm>
-            <a:off x="426709" y="4008019"/>
-            <a:ext cx="11338276" cy="1356326"/>
+            <a:off x="426709" y="4389010"/>
+            <a:ext cx="11338276" cy="1737316"/>
           </a:xfrm>
           <a:prstGeom prst="rect">
             <a:avLst/>
@@ -3410,32 +3411,8 @@
         </p:blipFill>
         <p:spPr>
           <a:xfrm>
-            <a:off x="3474633" y="4236614"/>
-            <a:ext cx="1127731" cy="822939"/>
-          </a:xfrm>
-          <a:prstGeom prst="rect">
-            <a:avLst/>
-          </a:prstGeom>
-        </p:spPr>
-      </p:pic>
-      <p:pic>
-        <p:nvPicPr>
-          <p:cNvPr id="9" name="Picture 8" descr="c9_7_0.jpg"/>
-          <p:cNvPicPr>
-            <a:picLocks noChangeAspect="1"/>
-          </p:cNvPicPr>
-          <p:nvPr/>
-        </p:nvPicPr>
-        <p:blipFill>
-          <a:blip r:embed="rId9"/>
-          <a:stretch>
-            <a:fillRect/>
-          </a:stretch>
-        </p:blipFill>
-        <p:spPr>
-          <a:xfrm>
-            <a:off x="8275112" y="45718"/>
-            <a:ext cx="3489872" cy="1584920"/>
+            <a:off x="9875272" y="4693802"/>
+            <a:ext cx="1661118" cy="1127731"/>
           </a:xfrm>
           <a:prstGeom prst="rect">
             <a:avLst/>
@@ -3444,8 +3421,8 @@
       </p:pic>
       <p:sp>
         <p:nvSpPr>
-          <p:cNvPr id="10" name="TextBox 9">
-            <a:hlinkClick action="ppaction://hlinksldjump" r:id="rId10"/>
+          <p:cNvPr id="9" name="TextBox 8">
+            <a:hlinkClick action="ppaction://hlinksldjump" r:id="rId9"/>
           </p:cNvPr>
           <p:cNvSpPr txBox="1"/>
           <p:nvPr/>
@@ -3601,7 +3578,7 @@
                             </p:stCondLst>
                             <p:childTnLst>
                               <p:par>
-                                <p:cTn id="11" presetID="10" presetClass="entr" presetSubtype="0" fill="hold" grpId="0" nodeType="clickEffect">
+                                <p:cTn id="11" presetID="53" presetClass="entr" presetSubtype="16" fill="hold" grpId="0" nodeType="clickEffect">
                                   <p:stCondLst>
                                     <p:cond delay="0"/>
                                   </p:stCondLst>
@@ -3624,9 +3601,55 @@
                                         <p:strVal val="visible"/>
                                       </p:to>
                                     </p:set>
+                                    <p:anim calcmode="lin" valueType="num">
+                                      <p:cBhvr additive="base">
+                                        <p:cTn id="13" dur="420" fill="hold"/>
+                                        <p:tgtEl>
+                                          <p:spTgt spid="4"/>
+                                        </p:tgtEl>
+                                        <p:attrNameLst>
+                                          <p:attrName>ppt_w</p:attrName>
+                                        </p:attrNameLst>
+                                      </p:cBhvr>
+                                      <p:tavLst>
+                                        <p:tav tm="0">
+                                          <p:val>
+                                            <p:strVal val="0"/>
+                                          </p:val>
+                                        </p:tav>
+                                        <p:tav tm="100000">
+                                          <p:val>
+                                            <p:strVal val="#ppt_w"/>
+                                          </p:val>
+                                        </p:tav>
+                                      </p:tavLst>
+                                    </p:anim>
+                                    <p:anim calcmode="lin" valueType="num">
+                                      <p:cBhvr additive="base">
+                                        <p:cTn id="14" dur="420" fill="hold"/>
+                                        <p:tgtEl>
+                                          <p:spTgt spid="4"/>
+                                        </p:tgtEl>
+                                        <p:attrNameLst>
+                                          <p:attrName>ppt_h</p:attrName>
+                                        </p:attrNameLst>
+                                      </p:cBhvr>
+                                      <p:tavLst>
+                                        <p:tav tm="0">
+                                          <p:val>
+                                            <p:strVal val="0"/>
+                                          </p:val>
+                                        </p:tav>
+                                        <p:tav tm="100000">
+                                          <p:val>
+                                            <p:strVal val="#ppt_h"/>
+                                          </p:val>
+                                        </p:tav>
+                                      </p:tavLst>
+                                    </p:anim>
                                     <p:animEffect transition="in" filter="fade">
                                       <p:cBhvr>
-                                        <p:cTn id="13" dur="450"/>
+                                        <p:cTn id="15" dur="420"/>
                                         <p:tgtEl>
                                           <p:spTgt spid="4"/>
                                         </p:tgtEl>
@@ -3642,26 +3665,26 @@
                     </p:cTn>
                   </p:par>
                   <p:par>
-                    <p:cTn id="14" fill="hold">
+                    <p:cTn id="16" fill="hold">
                       <p:stCondLst>
                         <p:cond delay="indefinite"/>
                       </p:stCondLst>
                       <p:childTnLst>
                         <p:par>
-                          <p:cTn id="15" fill="hold">
+                          <p:cTn id="17" fill="hold">
                             <p:stCondLst>
                               <p:cond delay="0"/>
                             </p:stCondLst>
                             <p:childTnLst>
                               <p:par>
-                                <p:cTn id="16" presetID="2" presetClass="entr" presetSubtype="8" fill="hold" decel="100000" grpId="0" nodeType="clickEffect">
+                                <p:cTn id="18" presetID="2" presetClass="entr" presetSubtype="8" fill="hold" decel="100000" grpId="0" nodeType="clickEffect">
                                   <p:stCondLst>
                                     <p:cond delay="0"/>
                                   </p:stCondLst>
                                   <p:childTnLst>
                                     <p:set>
                                       <p:cBhvr>
-                                        <p:cTn id="17" dur="1" fill="hold">
+                                        <p:cTn id="19" dur="1" fill="hold">
                                           <p:stCondLst>
                                             <p:cond delay="0"/>
                                           </p:stCondLst>
@@ -3679,7 +3702,7 @@
                                     </p:set>
                                     <p:anim calcmode="lin" valueType="num">
                                       <p:cBhvr additive="base">
-                                        <p:cTn id="18" dur="550" fill="hold"/>
+                                        <p:cTn id="20" dur="550" fill="hold"/>
                                         <p:tgtEl>
                                           <p:spTgt spid="5"/>
                                         </p:tgtEl>
@@ -3702,7 +3725,7 @@
                                     </p:anim>
                                     <p:anim calcmode="lin" valueType="num">
                                       <p:cBhvr additive="base">
-                                        <p:cTn id="19" dur="550" fill="hold"/>
+                                        <p:cTn id="21" dur="550" fill="hold"/>
                                         <p:tgtEl>
                                           <p:spTgt spid="5"/>
                                         </p:tgtEl>
@@ -3733,26 +3756,26 @@
                     </p:cTn>
                   </p:par>
                   <p:par>
-                    <p:cTn id="20" fill="hold">
+                    <p:cTn id="22" fill="hold">
                       <p:stCondLst>
                         <p:cond delay="indefinite"/>
                       </p:stCondLst>
                       <p:childTnLst>
                         <p:par>
-                          <p:cTn id="21" fill="hold">
+                          <p:cTn id="23" fill="hold">
                             <p:stCondLst>
                               <p:cond delay="0"/>
                             </p:stCondLst>
                             <p:childTnLst>
                               <p:par>
-                                <p:cTn id="22" presetID="10" presetClass="entr" presetSubtype="0" fill="hold" grpId="0" nodeType="clickEffect">
+                                <p:cTn id="24" presetID="53" presetClass="entr" presetSubtype="16" fill="hold" grpId="0" nodeType="clickEffect">
                                   <p:stCondLst>
                                     <p:cond delay="0"/>
                                   </p:stCondLst>
                                   <p:childTnLst>
                                     <p:set>
                                       <p:cBhvr>
-                                        <p:cTn id="23" dur="1" fill="hold">
+                                        <p:cTn id="25" dur="1" fill="hold">
                                           <p:stCondLst>
                                             <p:cond delay="0"/>
                                           </p:stCondLst>
@@ -3768,9 +3791,55 @@
                                         <p:strVal val="visible"/>
                                       </p:to>
                                     </p:set>
+                                    <p:anim calcmode="lin" valueType="num">
+                                      <p:cBhvr additive="base">
+                                        <p:cTn id="26" dur="420" fill="hold"/>
+                                        <p:tgtEl>
+                                          <p:spTgt spid="6"/>
+                                        </p:tgtEl>
+                                        <p:attrNameLst>
+                                          <p:attrName>ppt_w</p:attrName>
+                                        </p:attrNameLst>
+                                      </p:cBhvr>
+                                      <p:tavLst>
+                                        <p:tav tm="0">
+                                          <p:val>
+                                            <p:strVal val="0"/>
+                                          </p:val>
+                                        </p:tav>
+                                        <p:tav tm="100000">
+                                          <p:val>
+                                            <p:strVal val="#ppt_w"/>
+                                          </p:val>
+                                        </p:tav>
+                                      </p:tavLst>
+                                    </p:anim>
+                                    <p:anim calcmode="lin" valueType="num">
+                                      <p:cBhvr additive="base">
+                                        <p:cTn id="27" dur="420" fill="hold"/>
+                                        <p:tgtEl>
+                                          <p:spTgt spid="6"/>
+                                        </p:tgtEl>
+                                        <p:attrNameLst>
+                                          <p:attrName>ppt_h</p:attrName>
+                                        </p:attrNameLst>
+                                      </p:cBhvr>
+                                      <p:tavLst>
+                                        <p:tav tm="0">
+                                          <p:val>
+                                            <p:strVal val="0"/>
+                                          </p:val>
+                                        </p:tav>
+                                        <p:tav tm="100000">
+                                          <p:val>
+                                            <p:strVal val="#ppt_h"/>
+                                          </p:val>
+                                        </p:tav>
+                                      </p:tavLst>
+                                    </p:anim>
                                     <p:animEffect transition="in" filter="fade">
                                       <p:cBhvr>
-                                        <p:cTn id="24" dur="450"/>
+                                        <p:cTn id="28" dur="420"/>
                                         <p:tgtEl>
                                           <p:spTgt spid="6"/>
                                         </p:tgtEl>
@@ -3786,26 +3855,26 @@
                     </p:cTn>
                   </p:par>
                   <p:par>
-                    <p:cTn id="25" fill="hold">
+                    <p:cTn id="29" fill="hold">
                       <p:stCondLst>
                         <p:cond delay="indefinite"/>
                       </p:stCondLst>
                       <p:childTnLst>
                         <p:par>
-                          <p:cTn id="26" fill="hold">
+                          <p:cTn id="30" fill="hold">
                             <p:stCondLst>
                               <p:cond delay="0"/>
                             </p:stCondLst>
                             <p:childTnLst>
                               <p:par>
-                                <p:cTn id="27" presetID="2" presetClass="entr" presetSubtype="8" fill="hold" decel="100000" grpId="0" nodeType="clickEffect">
+                                <p:cTn id="31" presetID="2" presetClass="entr" presetSubtype="8" fill="hold" decel="100000" grpId="0" nodeType="clickEffect">
                                   <p:stCondLst>
                                     <p:cond delay="0"/>
                                   </p:stCondLst>
                                   <p:childTnLst>
                                     <p:set>
                                       <p:cBhvr>
-                                        <p:cTn id="28" dur="1" fill="hold">
+                                        <p:cTn id="32" dur="1" fill="hold">
                                           <p:stCondLst>
                                             <p:cond delay="0"/>
                                           </p:stCondLst>
@@ -3823,7 +3892,7 @@
                                     </p:set>
                                     <p:anim calcmode="lin" valueType="num">
                                       <p:cBhvr additive="base">
-                                        <p:cTn id="29" dur="550" fill="hold"/>
+                                        <p:cTn id="33" dur="550" fill="hold"/>
                                         <p:tgtEl>
                                           <p:spTgt spid="7"/>
                                         </p:tgtEl>
@@ -3846,7 +3915,7 @@
                                     </p:anim>
                                     <p:anim calcmode="lin" valueType="num">
                                       <p:cBhvr additive="base">
-                                        <p:cTn id="30" dur="550" fill="hold"/>
+                                        <p:cTn id="34" dur="550" fill="hold"/>
                                         <p:tgtEl>
                                           <p:spTgt spid="7"/>
                                         </p:tgtEl>
@@ -3877,85 +3946,32 @@
                     </p:cTn>
                   </p:par>
                   <p:par>
-                    <p:cTn id="31" fill="hold">
+                    <p:cTn id="35" fill="hold">
                       <p:stCondLst>
                         <p:cond delay="indefinite"/>
                       </p:stCondLst>
                       <p:childTnLst>
                         <p:par>
-                          <p:cTn id="32" fill="hold">
+                          <p:cTn id="36" fill="hold">
                             <p:stCondLst>
                               <p:cond delay="0"/>
                             </p:stCondLst>
                             <p:childTnLst>
                               <p:par>
-                                <p:cTn id="33" presetID="10" presetClass="entr" presetSubtype="0" fill="hold" grpId="0" nodeType="clickEffect">
+                                <p:cTn id="37" presetID="53" presetClass="entr" presetSubtype="16" fill="hold" grpId="0" nodeType="clickEffect">
                                   <p:stCondLst>
                                     <p:cond delay="0"/>
                                   </p:stCondLst>
                                   <p:childTnLst>
                                     <p:set>
                                       <p:cBhvr>
-                                        <p:cTn id="34" dur="1" fill="hold">
+                                        <p:cTn id="38" dur="1" fill="hold">
                                           <p:stCondLst>
                                             <p:cond delay="0"/>
                                           </p:stCondLst>
                                         </p:cTn>
                                         <p:tgtEl>
                                           <p:spTgt spid="8"/>
-                                        </p:tgtEl>
-                                        <p:attrNameLst>
-                                          <p:attrName>style.visibility</p:attrName>
-                                        </p:attrNameLst>
-                                      </p:cBhvr>
-                                      <p:to>
-                                        <p:strVal val="visible"/>
-                                      </p:to>
-                                    </p:set>
-                                    <p:animEffect transition="in" filter="fade">
-                                      <p:cBhvr>
-                                        <p:cTn id="35" dur="450"/>
-                                        <p:tgtEl>
-                                          <p:spTgt spid="8"/>
-                                        </p:tgtEl>
-                                      </p:cBhvr>
-                                    </p:animEffect>
-                                  </p:childTnLst>
-                                </p:cTn>
-                              </p:par>
-                            </p:childTnLst>
-                          </p:cTn>
-                        </p:par>
-                      </p:childTnLst>
-                    </p:cTn>
-                  </p:par>
-                  <p:par>
-                    <p:cTn id="36" fill="hold">
-                      <p:stCondLst>
-                        <p:cond delay="indefinite"/>
-                      </p:stCondLst>
-                      <p:childTnLst>
-                        <p:par>
-                          <p:cTn id="37" fill="hold">
-                            <p:stCondLst>
-                              <p:cond delay="0"/>
-                            </p:stCondLst>
-                            <p:childTnLst>
-                              <p:par>
-                                <p:cTn id="38" presetID="53" presetClass="entr" presetSubtype="16" fill="hold" grpId="0" nodeType="clickEffect">
-                                  <p:stCondLst>
-                                    <p:cond delay="0"/>
-                                  </p:stCondLst>
-                                  <p:childTnLst>
-                                    <p:set>
-                                      <p:cBhvr>
-                                        <p:cTn id="39" dur="1" fill="hold">
-                                          <p:stCondLst>
-                                            <p:cond delay="0"/>
-                                          </p:stCondLst>
-                                        </p:cTn>
-                                        <p:tgtEl>
-                                          <p:spTgt spid="9"/>
                                         </p:tgtEl>
                                         <p:attrNameLst>
                                           <p:attrName>style.visibility</p:attrName>
@@ -3967,9 +3983,9 @@
                                     </p:set>
                                     <p:anim calcmode="lin" valueType="num">
                                       <p:cBhvr additive="base">
-                                        <p:cTn id="40" dur="420" fill="hold"/>
-                                        <p:tgtEl>
-                                          <p:spTgt spid="9"/>
+                                        <p:cTn id="39" dur="420" fill="hold"/>
+                                        <p:tgtEl>
+                                          <p:spTgt spid="8"/>
                                         </p:tgtEl>
                                         <p:attrNameLst>
                                           <p:attrName>ppt_w</p:attrName>
@@ -3990,9 +4006,9 @@
                                     </p:anim>
                                     <p:anim calcmode="lin" valueType="num">
                                       <p:cBhvr additive="base">
-                                        <p:cTn id="41" dur="420" fill="hold"/>
-                                        <p:tgtEl>
-                                          <p:spTgt spid="9"/>
+                                        <p:cTn id="40" dur="420" fill="hold"/>
+                                        <p:tgtEl>
+                                          <p:spTgt spid="8"/>
                                         </p:tgtEl>
                                         <p:attrNameLst>
                                           <p:attrName>ppt_h</p:attrName>
@@ -4013,9 +4029,9 @@
                                     </p:anim>
                                     <p:animEffect transition="in" filter="fade">
                                       <p:cBhvr>
-                                        <p:cTn id="42" dur="420"/>
-                                        <p:tgtEl>
-                                          <p:spTgt spid="9"/>
+                                        <p:cTn id="41" dur="420"/>
+                                        <p:tgtEl>
+                                          <p:spTgt spid="8"/>
                                         </p:tgtEl>
                                       </p:cBhvr>
                                     </p:animEffect>
@@ -4103,6 +4119,819 @@
         </p:blipFill>
         <p:spPr>
           <a:xfrm>
+            <a:off x="426709" y="1417284"/>
+            <a:ext cx="11338276" cy="1356326"/>
+          </a:xfrm>
+          <a:prstGeom prst="rect">
+            <a:avLst/>
+          </a:prstGeom>
+        </p:spPr>
+      </p:pic>
+      <p:pic>
+        <p:nvPicPr>
+          <p:cNvPr id="4" name="Picture 3" descr="c10_2_0.jpg"/>
+          <p:cNvPicPr>
+            <a:picLocks noChangeAspect="1"/>
+          </p:cNvPicPr>
+          <p:nvPr/>
+        </p:nvPicPr>
+        <p:blipFill>
+          <a:blip r:embed="rId4"/>
+          <a:stretch>
+            <a:fillRect/>
+          </a:stretch>
+        </p:blipFill>
+        <p:spPr>
+          <a:xfrm>
+            <a:off x="3703227" y="1645878"/>
+            <a:ext cx="1432524" cy="822939"/>
+          </a:xfrm>
+          <a:prstGeom prst="rect">
+            <a:avLst/>
+          </a:prstGeom>
+        </p:spPr>
+      </p:pic>
+      <p:pic>
+        <p:nvPicPr>
+          <p:cNvPr id="5" name="Picture 4" descr="c10_3_0.jpg"/>
+          <p:cNvPicPr>
+            <a:picLocks noChangeAspect="1"/>
+          </p:cNvPicPr>
+          <p:nvPr/>
+        </p:nvPicPr>
+        <p:blipFill>
+          <a:blip r:embed="rId5"/>
+          <a:stretch>
+            <a:fillRect/>
+          </a:stretch>
+        </p:blipFill>
+        <p:spPr>
+          <a:xfrm>
+            <a:off x="426709" y="2712652"/>
+            <a:ext cx="11338276" cy="1356326"/>
+          </a:xfrm>
+          <a:prstGeom prst="rect">
+            <a:avLst/>
+          </a:prstGeom>
+        </p:spPr>
+      </p:pic>
+      <p:pic>
+        <p:nvPicPr>
+          <p:cNvPr id="6" name="Picture 5" descr="c10_4_0.jpg"/>
+          <p:cNvPicPr>
+            <a:picLocks noChangeAspect="1"/>
+          </p:cNvPicPr>
+          <p:nvPr/>
+        </p:nvPicPr>
+        <p:blipFill>
+          <a:blip r:embed="rId6"/>
+          <a:stretch>
+            <a:fillRect/>
+          </a:stretch>
+        </p:blipFill>
+        <p:spPr>
+          <a:xfrm>
+            <a:off x="3627029" y="2941246"/>
+            <a:ext cx="822939" cy="822939"/>
+          </a:xfrm>
+          <a:prstGeom prst="rect">
+            <a:avLst/>
+          </a:prstGeom>
+        </p:spPr>
+      </p:pic>
+      <p:pic>
+        <p:nvPicPr>
+          <p:cNvPr id="7" name="Picture 6" descr="c10_5_0.jpg"/>
+          <p:cNvPicPr>
+            <a:picLocks noChangeAspect="1"/>
+          </p:cNvPicPr>
+          <p:nvPr/>
+        </p:nvPicPr>
+        <p:blipFill>
+          <a:blip r:embed="rId7"/>
+          <a:stretch>
+            <a:fillRect/>
+          </a:stretch>
+        </p:blipFill>
+        <p:spPr>
+          <a:xfrm>
+            <a:off x="426709" y="4008019"/>
+            <a:ext cx="11338276" cy="1356326"/>
+          </a:xfrm>
+          <a:prstGeom prst="rect">
+            <a:avLst/>
+          </a:prstGeom>
+        </p:spPr>
+      </p:pic>
+      <p:pic>
+        <p:nvPicPr>
+          <p:cNvPr id="8" name="Picture 7" descr="c10_6_0.jpg"/>
+          <p:cNvPicPr>
+            <a:picLocks noChangeAspect="1"/>
+          </p:cNvPicPr>
+          <p:nvPr/>
+        </p:nvPicPr>
+        <p:blipFill>
+          <a:blip r:embed="rId8"/>
+          <a:stretch>
+            <a:fillRect/>
+          </a:stretch>
+        </p:blipFill>
+        <p:spPr>
+          <a:xfrm>
+            <a:off x="3474633" y="4236614"/>
+            <a:ext cx="1127731" cy="822939"/>
+          </a:xfrm>
+          <a:prstGeom prst="rect">
+            <a:avLst/>
+          </a:prstGeom>
+        </p:spPr>
+      </p:pic>
+      <p:pic>
+        <p:nvPicPr>
+          <p:cNvPr id="9" name="Picture 8" descr="c10_7_0.jpg"/>
+          <p:cNvPicPr>
+            <a:picLocks noChangeAspect="1"/>
+          </p:cNvPicPr>
+          <p:nvPr/>
+        </p:nvPicPr>
+        <p:blipFill>
+          <a:blip r:embed="rId9"/>
+          <a:stretch>
+            <a:fillRect/>
+          </a:stretch>
+        </p:blipFill>
+        <p:spPr>
+          <a:xfrm>
+            <a:off x="8275112" y="45718"/>
+            <a:ext cx="3489872" cy="1584920"/>
+          </a:xfrm>
+          <a:prstGeom prst="rect">
+            <a:avLst/>
+          </a:prstGeom>
+        </p:spPr>
+      </p:pic>
+      <p:sp>
+        <p:nvSpPr>
+          <p:cNvPr id="10" name="TextBox 9">
+            <a:hlinkClick action="ppaction://hlinksldjump" r:id="rId10"/>
+          </p:cNvPr>
+          <p:cNvSpPr txBox="1"/>
+          <p:nvPr/>
+        </p:nvSpPr>
+        <p:spPr>
+          <a:xfrm>
+            <a:off x="11048723" y="76198"/>
+            <a:ext cx="1066773" cy="304792"/>
+          </a:xfrm>
+          <a:prstGeom prst="rect">
+            <a:avLst/>
+          </a:prstGeom>
+          <a:noFill/>
+        </p:spPr>
+        <p:txBody>
+          <a:bodyPr wrap="none">
+            <a:spAutoFit/>
+          </a:bodyPr>
+          <a:lstStyle/>
+          <a:p>
+            <a:pPr algn="r"/>
+            <a:r>
+              <a:rPr sz="1200" b="0">
+                <a:solidFill>
+                  <a:srgbClr val="8A8F96"/>
+                </a:solidFill>
+                <a:latin typeface="微軟正黑體"/>
+                <a:ea typeface="微軟正黑體"/>
+                <a:cs typeface="微軟正黑體"/>
+              </a:rPr>
+              <a:t>流程 ↩</a:t>
+            </a:r>
+          </a:p>
+        </p:txBody>
+      </p:sp>
+    </p:spTree>
+  </p:cSld>
+  <p:clrMapOvr>
+    <a:masterClrMapping/>
+  </p:clrMapOvr>
+  <p:transition spd="med">
+    <p:push dir="l"/>
+  </p:transition>
+  <p:timing>
+    <p:tnLst>
+      <p:par>
+        <p:cTn id="1" dur="indefinite" restart="never" nodeType="tmRoot">
+          <p:childTnLst>
+            <p:seq concurrent="1" nextAc="seek">
+              <p:cTn id="2" dur="indefinite" nodeType="mainSeq">
+                <p:childTnLst>
+                  <p:par>
+                    <p:cTn id="3" fill="hold">
+                      <p:stCondLst>
+                        <p:cond delay="indefinite"/>
+                      </p:stCondLst>
+                      <p:childTnLst>
+                        <p:par>
+                          <p:cTn id="4" fill="hold">
+                            <p:stCondLst>
+                              <p:cond delay="0"/>
+                            </p:stCondLst>
+                            <p:childTnLst>
+                              <p:par>
+                                <p:cTn id="5" presetID="2" presetClass="entr" presetSubtype="8" fill="hold" decel="100000" grpId="0" nodeType="clickEffect">
+                                  <p:stCondLst>
+                                    <p:cond delay="0"/>
+                                  </p:stCondLst>
+                                  <p:childTnLst>
+                                    <p:set>
+                                      <p:cBhvr>
+                                        <p:cTn id="6" dur="1" fill="hold">
+                                          <p:stCondLst>
+                                            <p:cond delay="0"/>
+                                          </p:stCondLst>
+                                        </p:cTn>
+                                        <p:tgtEl>
+                                          <p:spTgt spid="3"/>
+                                        </p:tgtEl>
+                                        <p:attrNameLst>
+                                          <p:attrName>style.visibility</p:attrName>
+                                        </p:attrNameLst>
+                                      </p:cBhvr>
+                                      <p:to>
+                                        <p:strVal val="visible"/>
+                                      </p:to>
+                                    </p:set>
+                                    <p:anim calcmode="lin" valueType="num">
+                                      <p:cBhvr additive="base">
+                                        <p:cTn id="7" dur="550" fill="hold"/>
+                                        <p:tgtEl>
+                                          <p:spTgt spid="3"/>
+                                        </p:tgtEl>
+                                        <p:attrNameLst>
+                                          <p:attrName>ppt_x</p:attrName>
+                                        </p:attrNameLst>
+                                      </p:cBhvr>
+                                      <p:tavLst>
+                                        <p:tav tm="0">
+                                          <p:val>
+                                            <p:strVal val="0-#ppt_w/2"/>
+                                          </p:val>
+                                        </p:tav>
+                                        <p:tav tm="100000">
+                                          <p:val>
+                                            <p:strVal val="#ppt_x"/>
+                                          </p:val>
+                                        </p:tav>
+                                      </p:tavLst>
+                                    </p:anim>
+                                    <p:anim calcmode="lin" valueType="num">
+                                      <p:cBhvr additive="base">
+                                        <p:cTn id="8" dur="550" fill="hold"/>
+                                        <p:tgtEl>
+                                          <p:spTgt spid="3"/>
+                                        </p:tgtEl>
+                                        <p:attrNameLst>
+                                          <p:attrName>ppt_y</p:attrName>
+                                        </p:attrNameLst>
+                                      </p:cBhvr>
+                                      <p:tavLst>
+                                        <p:tav tm="0">
+                                          <p:val>
+                                            <p:strVal val="#ppt_y"/>
+                                          </p:val>
+                                        </p:tav>
+                                        <p:tav tm="100000">
+                                          <p:val>
+                                            <p:strVal val="#ppt_y"/>
+                                          </p:val>
+                                        </p:tav>
+                                      </p:tavLst>
+                                    </p:anim>
+                                  </p:childTnLst>
+                                </p:cTn>
+                              </p:par>
+                            </p:childTnLst>
+                          </p:cTn>
+                        </p:par>
+                      </p:childTnLst>
+                    </p:cTn>
+                  </p:par>
+                  <p:par>
+                    <p:cTn id="9" fill="hold">
+                      <p:stCondLst>
+                        <p:cond delay="indefinite"/>
+                      </p:stCondLst>
+                      <p:childTnLst>
+                        <p:par>
+                          <p:cTn id="10" fill="hold">
+                            <p:stCondLst>
+                              <p:cond delay="0"/>
+                            </p:stCondLst>
+                            <p:childTnLst>
+                              <p:par>
+                                <p:cTn id="11" presetID="10" presetClass="entr" presetSubtype="0" fill="hold" grpId="0" nodeType="clickEffect">
+                                  <p:stCondLst>
+                                    <p:cond delay="0"/>
+                                  </p:stCondLst>
+                                  <p:childTnLst>
+                                    <p:set>
+                                      <p:cBhvr>
+                                        <p:cTn id="12" dur="1" fill="hold">
+                                          <p:stCondLst>
+                                            <p:cond delay="0"/>
+                                          </p:stCondLst>
+                                        </p:cTn>
+                                        <p:tgtEl>
+                                          <p:spTgt spid="4"/>
+                                        </p:tgtEl>
+                                        <p:attrNameLst>
+                                          <p:attrName>style.visibility</p:attrName>
+                                        </p:attrNameLst>
+                                      </p:cBhvr>
+                                      <p:to>
+                                        <p:strVal val="visible"/>
+                                      </p:to>
+                                    </p:set>
+                                    <p:animEffect transition="in" filter="fade">
+                                      <p:cBhvr>
+                                        <p:cTn id="13" dur="450"/>
+                                        <p:tgtEl>
+                                          <p:spTgt spid="4"/>
+                                        </p:tgtEl>
+                                      </p:cBhvr>
+                                    </p:animEffect>
+                                  </p:childTnLst>
+                                </p:cTn>
+                              </p:par>
+                            </p:childTnLst>
+                          </p:cTn>
+                        </p:par>
+                      </p:childTnLst>
+                    </p:cTn>
+                  </p:par>
+                  <p:par>
+                    <p:cTn id="14" fill="hold">
+                      <p:stCondLst>
+                        <p:cond delay="indefinite"/>
+                      </p:stCondLst>
+                      <p:childTnLst>
+                        <p:par>
+                          <p:cTn id="15" fill="hold">
+                            <p:stCondLst>
+                              <p:cond delay="0"/>
+                            </p:stCondLst>
+                            <p:childTnLst>
+                              <p:par>
+                                <p:cTn id="16" presetID="2" presetClass="entr" presetSubtype="8" fill="hold" decel="100000" grpId="0" nodeType="clickEffect">
+                                  <p:stCondLst>
+                                    <p:cond delay="0"/>
+                                  </p:stCondLst>
+                                  <p:childTnLst>
+                                    <p:set>
+                                      <p:cBhvr>
+                                        <p:cTn id="17" dur="1" fill="hold">
+                                          <p:stCondLst>
+                                            <p:cond delay="0"/>
+                                          </p:stCondLst>
+                                        </p:cTn>
+                                        <p:tgtEl>
+                                          <p:spTgt spid="5"/>
+                                        </p:tgtEl>
+                                        <p:attrNameLst>
+                                          <p:attrName>style.visibility</p:attrName>
+                                        </p:attrNameLst>
+                                      </p:cBhvr>
+                                      <p:to>
+                                        <p:strVal val="visible"/>
+                                      </p:to>
+                                    </p:set>
+                                    <p:anim calcmode="lin" valueType="num">
+                                      <p:cBhvr additive="base">
+                                        <p:cTn id="18" dur="550" fill="hold"/>
+                                        <p:tgtEl>
+                                          <p:spTgt spid="5"/>
+                                        </p:tgtEl>
+                                        <p:attrNameLst>
+                                          <p:attrName>ppt_x</p:attrName>
+                                        </p:attrNameLst>
+                                      </p:cBhvr>
+                                      <p:tavLst>
+                                        <p:tav tm="0">
+                                          <p:val>
+                                            <p:strVal val="0-#ppt_w/2"/>
+                                          </p:val>
+                                        </p:tav>
+                                        <p:tav tm="100000">
+                                          <p:val>
+                                            <p:strVal val="#ppt_x"/>
+                                          </p:val>
+                                        </p:tav>
+                                      </p:tavLst>
+                                    </p:anim>
+                                    <p:anim calcmode="lin" valueType="num">
+                                      <p:cBhvr additive="base">
+                                        <p:cTn id="19" dur="550" fill="hold"/>
+                                        <p:tgtEl>
+                                          <p:spTgt spid="5"/>
+                                        </p:tgtEl>
+                                        <p:attrNameLst>
+                                          <p:attrName>ppt_y</p:attrName>
+                                        </p:attrNameLst>
+                                      </p:cBhvr>
+                                      <p:tavLst>
+                                        <p:tav tm="0">
+                                          <p:val>
+                                            <p:strVal val="#ppt_y"/>
+                                          </p:val>
+                                        </p:tav>
+                                        <p:tav tm="100000">
+                                          <p:val>
+                                            <p:strVal val="#ppt_y"/>
+                                          </p:val>
+                                        </p:tav>
+                                      </p:tavLst>
+                                    </p:anim>
+                                  </p:childTnLst>
+                                </p:cTn>
+                              </p:par>
+                            </p:childTnLst>
+                          </p:cTn>
+                        </p:par>
+                      </p:childTnLst>
+                    </p:cTn>
+                  </p:par>
+                  <p:par>
+                    <p:cTn id="20" fill="hold">
+                      <p:stCondLst>
+                        <p:cond delay="indefinite"/>
+                      </p:stCondLst>
+                      <p:childTnLst>
+                        <p:par>
+                          <p:cTn id="21" fill="hold">
+                            <p:stCondLst>
+                              <p:cond delay="0"/>
+                            </p:stCondLst>
+                            <p:childTnLst>
+                              <p:par>
+                                <p:cTn id="22" presetID="10" presetClass="entr" presetSubtype="0" fill="hold" grpId="0" nodeType="clickEffect">
+                                  <p:stCondLst>
+                                    <p:cond delay="0"/>
+                                  </p:stCondLst>
+                                  <p:childTnLst>
+                                    <p:set>
+                                      <p:cBhvr>
+                                        <p:cTn id="23" dur="1" fill="hold">
+                                          <p:stCondLst>
+                                            <p:cond delay="0"/>
+                                          </p:stCondLst>
+                                        </p:cTn>
+                                        <p:tgtEl>
+                                          <p:spTgt spid="6"/>
+                                        </p:tgtEl>
+                                        <p:attrNameLst>
+                                          <p:attrName>style.visibility</p:attrName>
+                                        </p:attrNameLst>
+                                      </p:cBhvr>
+                                      <p:to>
+                                        <p:strVal val="visible"/>
+                                      </p:to>
+                                    </p:set>
+                                    <p:animEffect transition="in" filter="fade">
+                                      <p:cBhvr>
+                                        <p:cTn id="24" dur="450"/>
+                                        <p:tgtEl>
+                                          <p:spTgt spid="6"/>
+                                        </p:tgtEl>
+                                      </p:cBhvr>
+                                    </p:animEffect>
+                                  </p:childTnLst>
+                                </p:cTn>
+                              </p:par>
+                            </p:childTnLst>
+                          </p:cTn>
+                        </p:par>
+                      </p:childTnLst>
+                    </p:cTn>
+                  </p:par>
+                  <p:par>
+                    <p:cTn id="25" fill="hold">
+                      <p:stCondLst>
+                        <p:cond delay="indefinite"/>
+                      </p:stCondLst>
+                      <p:childTnLst>
+                        <p:par>
+                          <p:cTn id="26" fill="hold">
+                            <p:stCondLst>
+                              <p:cond delay="0"/>
+                            </p:stCondLst>
+                            <p:childTnLst>
+                              <p:par>
+                                <p:cTn id="27" presetID="2" presetClass="entr" presetSubtype="8" fill="hold" decel="100000" grpId="0" nodeType="clickEffect">
+                                  <p:stCondLst>
+                                    <p:cond delay="0"/>
+                                  </p:stCondLst>
+                                  <p:childTnLst>
+                                    <p:set>
+                                      <p:cBhvr>
+                                        <p:cTn id="28" dur="1" fill="hold">
+                                          <p:stCondLst>
+                                            <p:cond delay="0"/>
+                                          </p:stCondLst>
+                                        </p:cTn>
+                                        <p:tgtEl>
+                                          <p:spTgt spid="7"/>
+                                        </p:tgtEl>
+                                        <p:attrNameLst>
+                                          <p:attrName>style.visibility</p:attrName>
+                                        </p:attrNameLst>
+                                      </p:cBhvr>
+                                      <p:to>
+                                        <p:strVal val="visible"/>
+                                      </p:to>
+                                    </p:set>
+                                    <p:anim calcmode="lin" valueType="num">
+                                      <p:cBhvr additive="base">
+                                        <p:cTn id="29" dur="550" fill="hold"/>
+                                        <p:tgtEl>
+                                          <p:spTgt spid="7"/>
+                                        </p:tgtEl>
+                                        <p:attrNameLst>
+                                          <p:attrName>ppt_x</p:attrName>
+                                        </p:attrNameLst>
+                                      </p:cBhvr>
+                                      <p:tavLst>
+                                        <p:tav tm="0">
+                                          <p:val>
+                                            <p:strVal val="0-#ppt_w/2"/>
+                                          </p:val>
+                                        </p:tav>
+                                        <p:tav tm="100000">
+                                          <p:val>
+                                            <p:strVal val="#ppt_x"/>
+                                          </p:val>
+                                        </p:tav>
+                                      </p:tavLst>
+                                    </p:anim>
+                                    <p:anim calcmode="lin" valueType="num">
+                                      <p:cBhvr additive="base">
+                                        <p:cTn id="30" dur="550" fill="hold"/>
+                                        <p:tgtEl>
+                                          <p:spTgt spid="7"/>
+                                        </p:tgtEl>
+                                        <p:attrNameLst>
+                                          <p:attrName>ppt_y</p:attrName>
+                                        </p:attrNameLst>
+                                      </p:cBhvr>
+                                      <p:tavLst>
+                                        <p:tav tm="0">
+                                          <p:val>
+                                            <p:strVal val="#ppt_y"/>
+                                          </p:val>
+                                        </p:tav>
+                                        <p:tav tm="100000">
+                                          <p:val>
+                                            <p:strVal val="#ppt_y"/>
+                                          </p:val>
+                                        </p:tav>
+                                      </p:tavLst>
+                                    </p:anim>
+                                  </p:childTnLst>
+                                </p:cTn>
+                              </p:par>
+                            </p:childTnLst>
+                          </p:cTn>
+                        </p:par>
+                      </p:childTnLst>
+                    </p:cTn>
+                  </p:par>
+                  <p:par>
+                    <p:cTn id="31" fill="hold">
+                      <p:stCondLst>
+                        <p:cond delay="indefinite"/>
+                      </p:stCondLst>
+                      <p:childTnLst>
+                        <p:par>
+                          <p:cTn id="32" fill="hold">
+                            <p:stCondLst>
+                              <p:cond delay="0"/>
+                            </p:stCondLst>
+                            <p:childTnLst>
+                              <p:par>
+                                <p:cTn id="33" presetID="10" presetClass="entr" presetSubtype="0" fill="hold" grpId="0" nodeType="clickEffect">
+                                  <p:stCondLst>
+                                    <p:cond delay="0"/>
+                                  </p:stCondLst>
+                                  <p:childTnLst>
+                                    <p:set>
+                                      <p:cBhvr>
+                                        <p:cTn id="34" dur="1" fill="hold">
+                                          <p:stCondLst>
+                                            <p:cond delay="0"/>
+                                          </p:stCondLst>
+                                        </p:cTn>
+                                        <p:tgtEl>
+                                          <p:spTgt spid="8"/>
+                                        </p:tgtEl>
+                                        <p:attrNameLst>
+                                          <p:attrName>style.visibility</p:attrName>
+                                        </p:attrNameLst>
+                                      </p:cBhvr>
+                                      <p:to>
+                                        <p:strVal val="visible"/>
+                                      </p:to>
+                                    </p:set>
+                                    <p:animEffect transition="in" filter="fade">
+                                      <p:cBhvr>
+                                        <p:cTn id="35" dur="450"/>
+                                        <p:tgtEl>
+                                          <p:spTgt spid="8"/>
+                                        </p:tgtEl>
+                                      </p:cBhvr>
+                                    </p:animEffect>
+                                  </p:childTnLst>
+                                </p:cTn>
+                              </p:par>
+                            </p:childTnLst>
+                          </p:cTn>
+                        </p:par>
+                      </p:childTnLst>
+                    </p:cTn>
+                  </p:par>
+                  <p:par>
+                    <p:cTn id="36" fill="hold">
+                      <p:stCondLst>
+                        <p:cond delay="indefinite"/>
+                      </p:stCondLst>
+                      <p:childTnLst>
+                        <p:par>
+                          <p:cTn id="37" fill="hold">
+                            <p:stCondLst>
+                              <p:cond delay="0"/>
+                            </p:stCondLst>
+                            <p:childTnLst>
+                              <p:par>
+                                <p:cTn id="38" presetID="53" presetClass="entr" presetSubtype="16" fill="hold" grpId="0" nodeType="clickEffect">
+                                  <p:stCondLst>
+                                    <p:cond delay="0"/>
+                                  </p:stCondLst>
+                                  <p:childTnLst>
+                                    <p:set>
+                                      <p:cBhvr>
+                                        <p:cTn id="39" dur="1" fill="hold">
+                                          <p:stCondLst>
+                                            <p:cond delay="0"/>
+                                          </p:stCondLst>
+                                        </p:cTn>
+                                        <p:tgtEl>
+                                          <p:spTgt spid="9"/>
+                                        </p:tgtEl>
+                                        <p:attrNameLst>
+                                          <p:attrName>style.visibility</p:attrName>
+                                        </p:attrNameLst>
+                                      </p:cBhvr>
+                                      <p:to>
+                                        <p:strVal val="visible"/>
+                                      </p:to>
+                                    </p:set>
+                                    <p:anim calcmode="lin" valueType="num">
+                                      <p:cBhvr additive="base">
+                                        <p:cTn id="40" dur="420" fill="hold"/>
+                                        <p:tgtEl>
+                                          <p:spTgt spid="9"/>
+                                        </p:tgtEl>
+                                        <p:attrNameLst>
+                                          <p:attrName>ppt_w</p:attrName>
+                                        </p:attrNameLst>
+                                      </p:cBhvr>
+                                      <p:tavLst>
+                                        <p:tav tm="0">
+                                          <p:val>
+                                            <p:strVal val="0"/>
+                                          </p:val>
+                                        </p:tav>
+                                        <p:tav tm="100000">
+                                          <p:val>
+                                            <p:strVal val="#ppt_w"/>
+                                          </p:val>
+                                        </p:tav>
+                                      </p:tavLst>
+                                    </p:anim>
+                                    <p:anim calcmode="lin" valueType="num">
+                                      <p:cBhvr additive="base">
+                                        <p:cTn id="41" dur="420" fill="hold"/>
+                                        <p:tgtEl>
+                                          <p:spTgt spid="9"/>
+                                        </p:tgtEl>
+                                        <p:attrNameLst>
+                                          <p:attrName>ppt_h</p:attrName>
+                                        </p:attrNameLst>
+                                      </p:cBhvr>
+                                      <p:tavLst>
+                                        <p:tav tm="0">
+                                          <p:val>
+                                            <p:strVal val="0"/>
+                                          </p:val>
+                                        </p:tav>
+                                        <p:tav tm="100000">
+                                          <p:val>
+                                            <p:strVal val="#ppt_h"/>
+                                          </p:val>
+                                        </p:tav>
+                                      </p:tavLst>
+                                    </p:anim>
+                                    <p:animEffect transition="in" filter="fade">
+                                      <p:cBhvr>
+                                        <p:cTn id="42" dur="420"/>
+                                        <p:tgtEl>
+                                          <p:spTgt spid="9"/>
+                                        </p:tgtEl>
+                                      </p:cBhvr>
+                                    </p:animEffect>
+                                  </p:childTnLst>
+                                </p:cTn>
+                              </p:par>
+                            </p:childTnLst>
+                          </p:cTn>
+                        </p:par>
+                      </p:childTnLst>
+                    </p:cTn>
+                  </p:par>
+                </p:childTnLst>
+              </p:cTn>
+              <p:prevCondLst>
+                <p:cond evt="onPrev" delay="0">
+                  <p:tgtEl>
+                    <p:sldTgt/>
+                  </p:tgtEl>
+                </p:cond>
+              </p:prevCondLst>
+              <p:nextCondLst>
+                <p:cond evt="onNext" delay="0">
+                  <p:tgtEl>
+                    <p:sldTgt/>
+                  </p:tgtEl>
+                </p:cond>
+              </p:nextCondLst>
+            </p:seq>
+          </p:childTnLst>
+        </p:cTn>
+      </p:par>
+    </p:tnLst>
+  </p:timing>
+</p:sld>
+</file>
+
+<file path=ppt/slides/slide12.xml><?xml version="1.0" encoding="utf-8"?>
+<p:sld xmlns:a="http://schemas.openxmlformats.org/drawingml/2006/main" xmlns:p="http://schemas.openxmlformats.org/presentationml/2006/main" xmlns:r="http://schemas.openxmlformats.org/officeDocument/2006/relationships">
+  <p:cSld>
+    <p:spTree>
+      <p:nvGrpSpPr>
+        <p:cNvPr id="1" name=""/>
+        <p:cNvGrpSpPr/>
+        <p:nvPr/>
+      </p:nvGrpSpPr>
+      <p:grpSpPr/>
+      <p:pic>
+        <p:nvPicPr>
+          <p:cNvPr id="2" name="Picture 1" descr="b11.jpg"/>
+          <p:cNvPicPr>
+            <a:picLocks noChangeAspect="1"/>
+          </p:cNvPicPr>
+          <p:nvPr/>
+        </p:nvPicPr>
+        <p:blipFill>
+          <a:blip r:embed="rId2"/>
+          <a:stretch>
+            <a:fillRect/>
+          </a:stretch>
+        </p:blipFill>
+        <p:spPr>
+          <a:xfrm>
+            <a:off x="0" y="0"/>
+            <a:ext cx="12191695" cy="6857828"/>
+          </a:xfrm>
+          <a:prstGeom prst="rect">
+            <a:avLst/>
+          </a:prstGeom>
+        </p:spPr>
+      </p:pic>
+      <p:pic>
+        <p:nvPicPr>
+          <p:cNvPr id="3" name="Picture 2" descr="c11_1_0.jpg"/>
+          <p:cNvPicPr>
+            <a:picLocks noChangeAspect="1"/>
+          </p:cNvPicPr>
+          <p:nvPr/>
+        </p:nvPicPr>
+        <p:blipFill>
+          <a:blip r:embed="rId3"/>
+          <a:stretch>
+            <a:fillRect/>
+          </a:stretch>
+        </p:blipFill>
+        <p:spPr>
+          <a:xfrm>
             <a:off x="426709" y="2636454"/>
             <a:ext cx="6537796" cy="1203929"/>
           </a:xfrm>
@@ -4113,7 +4942,7 @@
       </p:pic>
       <p:pic>
         <p:nvPicPr>
-          <p:cNvPr id="4" name="Picture 3" descr="c10_1_1.jpg"/>
+          <p:cNvPr id="4" name="Picture 3" descr="c11_1_1.jpg"/>
           <p:cNvPicPr>
             <a:picLocks noChangeAspect="1"/>
           </p:cNvPicPr>
@@ -4180,7 +5009,7 @@
     <a:masterClrMapping/>
   </p:clrMapOvr>
   <p:transition spd="med">
-    <p:push dir="l"/>
+    <p:cover dir="l"/>
   </p:transition>
   <p:timing>
     <p:tnLst>
@@ -5753,8 +6582,8 @@
         </p:blipFill>
         <p:spPr>
           <a:xfrm>
-            <a:off x="426709" y="2255463"/>
-            <a:ext cx="6233004" cy="1203929"/>
+            <a:off x="426709" y="1569680"/>
+            <a:ext cx="6233004" cy="1889712"/>
           </a:xfrm>
           <a:prstGeom prst="rect">
             <a:avLst/>
@@ -6016,7 +6845,7 @@
                             </p:stCondLst>
                             <p:childTnLst>
                               <p:par>
-                                <p:cTn id="11" presetID="2" presetClass="entr" presetSubtype="8" fill="hold" decel="100000" grpId="0" nodeType="clickEffect">
+                                <p:cTn id="11" presetID="10" presetClass="entr" presetSubtype="0" fill="hold" grpId="0" nodeType="clickEffect">
                                   <p:stCondLst>
                                     <p:cond delay="0"/>
                                   </p:stCondLst>
@@ -6039,11 +6868,64 @@
                                         <p:strVal val="visible"/>
                                       </p:to>
                                     </p:set>
+                                    <p:animEffect transition="in" filter="fade">
+                                      <p:cBhvr>
+                                        <p:cTn id="13" dur="450"/>
+                                        <p:tgtEl>
+                                          <p:spTgt spid="4"/>
+                                        </p:tgtEl>
+                                      </p:cBhvr>
+                                    </p:animEffect>
+                                  </p:childTnLst>
+                                </p:cTn>
+                              </p:par>
+                            </p:childTnLst>
+                          </p:cTn>
+                        </p:par>
+                      </p:childTnLst>
+                    </p:cTn>
+                  </p:par>
+                  <p:par>
+                    <p:cTn id="14" fill="hold">
+                      <p:stCondLst>
+                        <p:cond delay="indefinite"/>
+                      </p:stCondLst>
+                      <p:childTnLst>
+                        <p:par>
+                          <p:cTn id="15" fill="hold">
+                            <p:stCondLst>
+                              <p:cond delay="0"/>
+                            </p:stCondLst>
+                            <p:childTnLst>
+                              <p:par>
+                                <p:cTn id="16" presetID="2" presetClass="entr" presetSubtype="8" fill="hold" decel="100000" grpId="0" nodeType="clickEffect">
+                                  <p:stCondLst>
+                                    <p:cond delay="0"/>
+                                  </p:stCondLst>
+                                  <p:childTnLst>
+                                    <p:set>
+                                      <p:cBhvr>
+                                        <p:cTn id="17" dur="1" fill="hold">
+                                          <p:stCondLst>
+                                            <p:cond delay="0"/>
+                                          </p:stCondLst>
+                                        </p:cTn>
+                                        <p:tgtEl>
+                                          <p:spTgt spid="5"/>
+                                        </p:tgtEl>
+                                        <p:attrNameLst>
+                                          <p:attrName>style.visibility</p:attrName>
+                                        </p:attrNameLst>
+                                      </p:cBhvr>
+                                      <p:to>
+                                        <p:strVal val="visible"/>
+                                      </p:to>
+                                    </p:set>
                                     <p:anim calcmode="lin" valueType="num">
                                       <p:cBhvr additive="base">
-                                        <p:cTn id="13" dur="550" fill="hold"/>
-                                        <p:tgtEl>
-                                          <p:spTgt spid="4"/>
+                                        <p:cTn id="18" dur="550" fill="hold"/>
+                                        <p:tgtEl>
+                                          <p:spTgt spid="5"/>
                                         </p:tgtEl>
                                         <p:attrNameLst>
                                           <p:attrName>ppt_x</p:attrName>
@@ -6064,9 +6946,9 @@
                                     </p:anim>
                                     <p:anim calcmode="lin" valueType="num">
                                       <p:cBhvr additive="base">
-                                        <p:cTn id="14" dur="550" fill="hold"/>
-                                        <p:tgtEl>
-                                          <p:spTgt spid="4"/>
+                                        <p:cTn id="19" dur="550" fill="hold"/>
+                                        <p:tgtEl>
+                                          <p:spTgt spid="5"/>
                                         </p:tgtEl>
                                         <p:attrNameLst>
                                           <p:attrName>ppt_y</p:attrName>
@@ -6095,32 +6977,32 @@
                     </p:cTn>
                   </p:par>
                   <p:par>
-                    <p:cTn id="15" fill="hold">
+                    <p:cTn id="20" fill="hold">
                       <p:stCondLst>
                         <p:cond delay="indefinite"/>
                       </p:stCondLst>
                       <p:childTnLst>
                         <p:par>
-                          <p:cTn id="16" fill="hold">
+                          <p:cTn id="21" fill="hold">
                             <p:stCondLst>
                               <p:cond delay="0"/>
                             </p:stCondLst>
                             <p:childTnLst>
                               <p:par>
-                                <p:cTn id="17" presetID="2" presetClass="entr" presetSubtype="8" fill="hold" decel="100000" grpId="0" nodeType="clickEffect">
+                                <p:cTn id="22" presetID="2" presetClass="entr" presetSubtype="8" fill="hold" decel="100000" grpId="0" nodeType="clickEffect">
                                   <p:stCondLst>
                                     <p:cond delay="0"/>
                                   </p:stCondLst>
                                   <p:childTnLst>
                                     <p:set>
                                       <p:cBhvr>
-                                        <p:cTn id="18" dur="1" fill="hold">
+                                        <p:cTn id="23" dur="1" fill="hold">
                                           <p:stCondLst>
                                             <p:cond delay="0"/>
                                           </p:stCondLst>
                                         </p:cTn>
                                         <p:tgtEl>
-                                          <p:spTgt spid="5"/>
+                                          <p:spTgt spid="6"/>
                                         </p:tgtEl>
                                         <p:attrNameLst>
                                           <p:attrName>style.visibility</p:attrName>
@@ -6132,9 +7014,9 @@
                                     </p:set>
                                     <p:anim calcmode="lin" valueType="num">
                                       <p:cBhvr additive="base">
-                                        <p:cTn id="19" dur="550" fill="hold"/>
-                                        <p:tgtEl>
-                                          <p:spTgt spid="5"/>
+                                        <p:cTn id="24" dur="550" fill="hold"/>
+                                        <p:tgtEl>
+                                          <p:spTgt spid="6"/>
                                         </p:tgtEl>
                                         <p:attrNameLst>
                                           <p:attrName>ppt_x</p:attrName>
@@ -6155,9 +7037,9 @@
                                     </p:anim>
                                     <p:anim calcmode="lin" valueType="num">
                                       <p:cBhvr additive="base">
-                                        <p:cTn id="20" dur="550" fill="hold"/>
-                                        <p:tgtEl>
-                                          <p:spTgt spid="5"/>
+                                        <p:cTn id="25" dur="550" fill="hold"/>
+                                        <p:tgtEl>
+                                          <p:spTgt spid="6"/>
                                         </p:tgtEl>
                                         <p:attrNameLst>
                                           <p:attrName>ppt_y</p:attrName>
@@ -6186,32 +7068,32 @@
                     </p:cTn>
                   </p:par>
                   <p:par>
-                    <p:cTn id="21" fill="hold">
+                    <p:cTn id="26" fill="hold">
                       <p:stCondLst>
                         <p:cond delay="indefinite"/>
                       </p:stCondLst>
                       <p:childTnLst>
                         <p:par>
-                          <p:cTn id="22" fill="hold">
+                          <p:cTn id="27" fill="hold">
                             <p:stCondLst>
                               <p:cond delay="0"/>
                             </p:stCondLst>
                             <p:childTnLst>
                               <p:par>
-                                <p:cTn id="23" presetID="2" presetClass="entr" presetSubtype="8" fill="hold" decel="100000" grpId="0" nodeType="clickEffect">
+                                <p:cTn id="28" presetID="2" presetClass="entr" presetSubtype="8" fill="hold" decel="100000" grpId="0" nodeType="clickEffect">
                                   <p:stCondLst>
                                     <p:cond delay="0"/>
                                   </p:stCondLst>
                                   <p:childTnLst>
                                     <p:set>
                                       <p:cBhvr>
-                                        <p:cTn id="24" dur="1" fill="hold">
+                                        <p:cTn id="29" dur="1" fill="hold">
                                           <p:stCondLst>
                                             <p:cond delay="0"/>
                                           </p:stCondLst>
                                         </p:cTn>
                                         <p:tgtEl>
-                                          <p:spTgt spid="6"/>
+                                          <p:spTgt spid="7"/>
                                         </p:tgtEl>
                                         <p:attrNameLst>
                                           <p:attrName>style.visibility</p:attrName>
@@ -6223,9 +7105,9 @@
                                     </p:set>
                                     <p:anim calcmode="lin" valueType="num">
                                       <p:cBhvr additive="base">
-                                        <p:cTn id="25" dur="550" fill="hold"/>
-                                        <p:tgtEl>
-                                          <p:spTgt spid="6"/>
+                                        <p:cTn id="30" dur="550" fill="hold"/>
+                                        <p:tgtEl>
+                                          <p:spTgt spid="7"/>
                                         </p:tgtEl>
                                         <p:attrNameLst>
                                           <p:attrName>ppt_x</p:attrName>
@@ -6246,9 +7128,9 @@
                                     </p:anim>
                                     <p:anim calcmode="lin" valueType="num">
                                       <p:cBhvr additive="base">
-                                        <p:cTn id="26" dur="550" fill="hold"/>
-                                        <p:tgtEl>
-                                          <p:spTgt spid="6"/>
+                                        <p:cTn id="31" dur="550" fill="hold"/>
+                                        <p:tgtEl>
+                                          <p:spTgt spid="7"/>
                                         </p:tgtEl>
                                         <p:attrNameLst>
                                           <p:attrName>ppt_y</p:attrName>
@@ -6277,32 +7159,32 @@
                     </p:cTn>
                   </p:par>
                   <p:par>
-                    <p:cTn id="27" fill="hold">
+                    <p:cTn id="32" fill="hold">
                       <p:stCondLst>
                         <p:cond delay="indefinite"/>
                       </p:stCondLst>
                       <p:childTnLst>
                         <p:par>
-                          <p:cTn id="28" fill="hold">
+                          <p:cTn id="33" fill="hold">
                             <p:stCondLst>
                               <p:cond delay="0"/>
                             </p:stCondLst>
                             <p:childTnLst>
                               <p:par>
-                                <p:cTn id="29" presetID="2" presetClass="entr" presetSubtype="8" fill="hold" decel="100000" grpId="0" nodeType="clickEffect">
+                                <p:cTn id="34" presetID="2" presetClass="entr" presetSubtype="4" fill="hold" decel="100000" grpId="0" nodeType="clickEffect">
                                   <p:stCondLst>
                                     <p:cond delay="0"/>
                                   </p:stCondLst>
                                   <p:childTnLst>
                                     <p:set>
                                       <p:cBhvr>
-                                        <p:cTn id="30" dur="1" fill="hold">
+                                        <p:cTn id="35" dur="1" fill="hold">
                                           <p:stCondLst>
                                             <p:cond delay="0"/>
                                           </p:stCondLst>
                                         </p:cTn>
                                         <p:tgtEl>
-                                          <p:spTgt spid="7"/>
+                                          <p:spTgt spid="8"/>
                                         </p:tgtEl>
                                         <p:attrNameLst>
                                           <p:attrName>style.visibility</p:attrName>
@@ -6314,9 +7196,9 @@
                                     </p:set>
                                     <p:anim calcmode="lin" valueType="num">
                                       <p:cBhvr additive="base">
-                                        <p:cTn id="31" dur="550" fill="hold"/>
-                                        <p:tgtEl>
-                                          <p:spTgt spid="7"/>
+                                        <p:cTn id="36" dur="550" fill="hold"/>
+                                        <p:tgtEl>
+                                          <p:spTgt spid="8"/>
                                         </p:tgtEl>
                                         <p:attrNameLst>
                                           <p:attrName>ppt_x</p:attrName>
@@ -6325,7 +7207,7 @@
                                       <p:tavLst>
                                         <p:tav tm="0">
                                           <p:val>
-                                            <p:strVal val="0-#ppt_w/2"/>
+                                            <p:strVal val="#ppt_x"/>
                                           </p:val>
                                         </p:tav>
                                         <p:tav tm="100000">
@@ -6337,98 +7219,7 @@
                                     </p:anim>
                                     <p:anim calcmode="lin" valueType="num">
                                       <p:cBhvr additive="base">
-                                        <p:cTn id="32" dur="550" fill="hold"/>
-                                        <p:tgtEl>
-                                          <p:spTgt spid="7"/>
-                                        </p:tgtEl>
-                                        <p:attrNameLst>
-                                          <p:attrName>ppt_y</p:attrName>
-                                        </p:attrNameLst>
-                                      </p:cBhvr>
-                                      <p:tavLst>
-                                        <p:tav tm="0">
-                                          <p:val>
-                                            <p:strVal val="#ppt_y"/>
-                                          </p:val>
-                                        </p:tav>
-                                        <p:tav tm="100000">
-                                          <p:val>
-                                            <p:strVal val="#ppt_y"/>
-                                          </p:val>
-                                        </p:tav>
-                                      </p:tavLst>
-                                    </p:anim>
-                                  </p:childTnLst>
-                                </p:cTn>
-                              </p:par>
-                            </p:childTnLst>
-                          </p:cTn>
-                        </p:par>
-                      </p:childTnLst>
-                    </p:cTn>
-                  </p:par>
-                  <p:par>
-                    <p:cTn id="33" fill="hold">
-                      <p:stCondLst>
-                        <p:cond delay="indefinite"/>
-                      </p:stCondLst>
-                      <p:childTnLst>
-                        <p:par>
-                          <p:cTn id="34" fill="hold">
-                            <p:stCondLst>
-                              <p:cond delay="0"/>
-                            </p:stCondLst>
-                            <p:childTnLst>
-                              <p:par>
-                                <p:cTn id="35" presetID="2" presetClass="entr" presetSubtype="4" fill="hold" decel="100000" grpId="0" nodeType="clickEffect">
-                                  <p:stCondLst>
-                                    <p:cond delay="0"/>
-                                  </p:stCondLst>
-                                  <p:childTnLst>
-                                    <p:set>
-                                      <p:cBhvr>
-                                        <p:cTn id="36" dur="1" fill="hold">
-                                          <p:stCondLst>
-                                            <p:cond delay="0"/>
-                                          </p:stCondLst>
-                                        </p:cTn>
-                                        <p:tgtEl>
-                                          <p:spTgt spid="8"/>
-                                        </p:tgtEl>
-                                        <p:attrNameLst>
-                                          <p:attrName>style.visibility</p:attrName>
-                                        </p:attrNameLst>
-                                      </p:cBhvr>
-                                      <p:to>
-                                        <p:strVal val="visible"/>
-                                      </p:to>
-                                    </p:set>
-                                    <p:anim calcmode="lin" valueType="num">
-                                      <p:cBhvr additive="base">
                                         <p:cTn id="37" dur="550" fill="hold"/>
-                                        <p:tgtEl>
-                                          <p:spTgt spid="8"/>
-                                        </p:tgtEl>
-                                        <p:attrNameLst>
-                                          <p:attrName>ppt_x</p:attrName>
-                                        </p:attrNameLst>
-                                      </p:cBhvr>
-                                      <p:tavLst>
-                                        <p:tav tm="0">
-                                          <p:val>
-                                            <p:strVal val="#ppt_x"/>
-                                          </p:val>
-                                        </p:tav>
-                                        <p:tav tm="100000">
-                                          <p:val>
-                                            <p:strVal val="#ppt_x"/>
-                                          </p:val>
-                                        </p:tav>
-                                      </p:tavLst>
-                                    </p:anim>
-                                    <p:anim calcmode="lin" valueType="num">
-                                      <p:cBhvr additive="base">
-                                        <p:cTn id="38" dur="550" fill="hold"/>
                                         <p:tgtEl>
                                           <p:spTgt spid="8"/>
                                         </p:tgtEl>
@@ -8241,8 +9032,8 @@
         </p:blipFill>
         <p:spPr>
           <a:xfrm>
-            <a:off x="426709" y="1341086"/>
-            <a:ext cx="11338276" cy="1737316"/>
+            <a:off x="350511" y="1112492"/>
+            <a:ext cx="4099457" cy="4480447"/>
           </a:xfrm>
           <a:prstGeom prst="rect">
             <a:avLst/>
@@ -8265,8 +9056,8 @@
         </p:blipFill>
         <p:spPr>
           <a:xfrm>
-            <a:off x="10180065" y="1645878"/>
-            <a:ext cx="1356326" cy="1127731"/>
+            <a:off x="4084217" y="1188690"/>
+            <a:ext cx="4023259" cy="4404249"/>
           </a:xfrm>
           <a:prstGeom prst="rect">
             <a:avLst/>
@@ -8289,8 +9080,8 @@
         </p:blipFill>
         <p:spPr>
           <a:xfrm>
-            <a:off x="426709" y="2865048"/>
-            <a:ext cx="11338276" cy="1737316"/>
+            <a:off x="7817924" y="1188690"/>
+            <a:ext cx="4023259" cy="4328051"/>
           </a:xfrm>
           <a:prstGeom prst="rect">
             <a:avLst/>
@@ -8313,56 +9104,8 @@
         </p:blipFill>
         <p:spPr>
           <a:xfrm>
-            <a:off x="9494282" y="3093642"/>
-            <a:ext cx="2042108" cy="1203929"/>
-          </a:xfrm>
-          <a:prstGeom prst="rect">
-            <a:avLst/>
-          </a:prstGeom>
-        </p:spPr>
-      </p:pic>
-      <p:pic>
-        <p:nvPicPr>
-          <p:cNvPr id="7" name="Picture 6" descr="c8_5_0.jpg"/>
-          <p:cNvPicPr>
-            <a:picLocks noChangeAspect="1"/>
-          </p:cNvPicPr>
-          <p:nvPr/>
-        </p:nvPicPr>
-        <p:blipFill>
-          <a:blip r:embed="rId7"/>
-          <a:stretch>
-            <a:fillRect/>
-          </a:stretch>
-        </p:blipFill>
-        <p:spPr>
-          <a:xfrm>
-            <a:off x="426709" y="4389010"/>
-            <a:ext cx="11338276" cy="1737316"/>
-          </a:xfrm>
-          <a:prstGeom prst="rect">
-            <a:avLst/>
-          </a:prstGeom>
-        </p:spPr>
-      </p:pic>
-      <p:pic>
-        <p:nvPicPr>
-          <p:cNvPr id="8" name="Picture 7" descr="c8_6_0.jpg"/>
-          <p:cNvPicPr>
-            <a:picLocks noChangeAspect="1"/>
-          </p:cNvPicPr>
-          <p:nvPr/>
-        </p:nvPicPr>
-        <p:blipFill>
-          <a:blip r:embed="rId8"/>
-          <a:stretch>
-            <a:fillRect/>
-          </a:stretch>
-        </p:blipFill>
-        <p:spPr>
-          <a:xfrm>
-            <a:off x="9875272" y="4693802"/>
-            <a:ext cx="1661118" cy="1127731"/>
+            <a:off x="0" y="5836773"/>
+            <a:ext cx="12191695" cy="1021054"/>
           </a:xfrm>
           <a:prstGeom prst="rect">
             <a:avLst/>
@@ -8371,8 +9114,8 @@
       </p:pic>
       <p:sp>
         <p:nvSpPr>
-          <p:cNvPr id="9" name="TextBox 8">
-            <a:hlinkClick action="ppaction://hlinksldjump" r:id="rId9"/>
+          <p:cNvPr id="7" name="TextBox 6">
+            <a:hlinkClick action="ppaction://hlinksldjump" r:id="rId7"/>
           </p:cNvPr>
           <p:cNvSpPr txBox="1"/>
           <p:nvPr/>
@@ -8437,7 +9180,7 @@
                             </p:stCondLst>
                             <p:childTnLst>
                               <p:par>
-                                <p:cTn id="5" presetID="2" presetClass="entr" presetSubtype="8" fill="hold" decel="100000" grpId="0" nodeType="clickEffect">
+                                <p:cTn id="5" presetID="10" presetClass="entr" presetSubtype="0" fill="hold" grpId="0" nodeType="clickEffect">
                                   <p:stCondLst>
                                     <p:cond delay="0"/>
                                   </p:stCondLst>
@@ -8460,11 +9203,64 @@
                                         <p:strVal val="visible"/>
                                       </p:to>
                                     </p:set>
+                                    <p:animEffect transition="in" filter="fade">
+                                      <p:cBhvr>
+                                        <p:cTn id="7" dur="450"/>
+                                        <p:tgtEl>
+                                          <p:spTgt spid="3"/>
+                                        </p:tgtEl>
+                                      </p:cBhvr>
+                                    </p:animEffect>
+                                  </p:childTnLst>
+                                </p:cTn>
+                              </p:par>
+                            </p:childTnLst>
+                          </p:cTn>
+                        </p:par>
+                      </p:childTnLst>
+                    </p:cTn>
+                  </p:par>
+                  <p:par>
+                    <p:cTn id="8" fill="hold">
+                      <p:stCondLst>
+                        <p:cond delay="indefinite"/>
+                      </p:stCondLst>
+                      <p:childTnLst>
+                        <p:par>
+                          <p:cTn id="9" fill="hold">
+                            <p:stCondLst>
+                              <p:cond delay="0"/>
+                            </p:stCondLst>
+                            <p:childTnLst>
+                              <p:par>
+                                <p:cTn id="10" presetID="2" presetClass="entr" presetSubtype="4" fill="hold" decel="100000" grpId="0" nodeType="clickEffect">
+                                  <p:stCondLst>
+                                    <p:cond delay="0"/>
+                                  </p:stCondLst>
+                                  <p:childTnLst>
+                                    <p:set>
+                                      <p:cBhvr>
+                                        <p:cTn id="11" dur="1" fill="hold">
+                                          <p:stCondLst>
+                                            <p:cond delay="0"/>
+                                          </p:stCondLst>
+                                        </p:cTn>
+                                        <p:tgtEl>
+                                          <p:spTgt spid="4"/>
+                                        </p:tgtEl>
+                                        <p:attrNameLst>
+                                          <p:attrName>style.visibility</p:attrName>
+                                        </p:attrNameLst>
+                                      </p:cBhvr>
+                                      <p:to>
+                                        <p:strVal val="visible"/>
+                                      </p:to>
+                                    </p:set>
                                     <p:anim calcmode="lin" valueType="num">
                                       <p:cBhvr additive="base">
-                                        <p:cTn id="7" dur="550" fill="hold"/>
-                                        <p:tgtEl>
-                                          <p:spTgt spid="3"/>
+                                        <p:cTn id="12" dur="550" fill="hold"/>
+                                        <p:tgtEl>
+                                          <p:spTgt spid="4"/>
                                         </p:tgtEl>
                                         <p:attrNameLst>
                                           <p:attrName>ppt_x</p:attrName>
@@ -8473,7 +9269,7 @@
                                       <p:tavLst>
                                         <p:tav tm="0">
                                           <p:val>
-                                            <p:strVal val="0-#ppt_w/2"/>
+                                            <p:strVal val="#ppt_x"/>
                                           </p:val>
                                         </p:tav>
                                         <p:tav tm="100000">
@@ -8485,9 +9281,9 @@
                                     </p:anim>
                                     <p:anim calcmode="lin" valueType="num">
                                       <p:cBhvr additive="base">
-                                        <p:cTn id="8" dur="550" fill="hold"/>
-                                        <p:tgtEl>
-                                          <p:spTgt spid="3"/>
+                                        <p:cTn id="13" dur="550" fill="hold"/>
+                                        <p:tgtEl>
+                                          <p:spTgt spid="4"/>
                                         </p:tgtEl>
                                         <p:attrNameLst>
                                           <p:attrName>ppt_y</p:attrName>
@@ -8496,7 +9292,7 @@
                                       <p:tavLst>
                                         <p:tav tm="0">
                                           <p:val>
-                                            <p:strVal val="#ppt_y"/>
+                                            <p:strVal val="1+#ppt_h/2"/>
                                           </p:val>
                                         </p:tav>
                                         <p:tav tm="100000">
@@ -8516,32 +9312,32 @@
                     </p:cTn>
                   </p:par>
                   <p:par>
-                    <p:cTn id="9" fill="hold">
+                    <p:cTn id="14" fill="hold">
                       <p:stCondLst>
                         <p:cond delay="indefinite"/>
                       </p:stCondLst>
                       <p:childTnLst>
                         <p:par>
-                          <p:cTn id="10" fill="hold">
+                          <p:cTn id="15" fill="hold">
                             <p:stCondLst>
                               <p:cond delay="0"/>
                             </p:stCondLst>
                             <p:childTnLst>
                               <p:par>
-                                <p:cTn id="11" presetID="53" presetClass="entr" presetSubtype="16" fill="hold" grpId="0" nodeType="clickEffect">
+                                <p:cTn id="16" presetID="2" presetClass="entr" presetSubtype="4" fill="hold" decel="100000" grpId="0" nodeType="clickEffect">
                                   <p:stCondLst>
                                     <p:cond delay="0"/>
                                   </p:stCondLst>
                                   <p:childTnLst>
                                     <p:set>
                                       <p:cBhvr>
-                                        <p:cTn id="12" dur="1" fill="hold">
+                                        <p:cTn id="17" dur="1" fill="hold">
                                           <p:stCondLst>
                                             <p:cond delay="0"/>
                                           </p:stCondLst>
                                         </p:cTn>
                                         <p:tgtEl>
-                                          <p:spTgt spid="4"/>
+                                          <p:spTgt spid="5"/>
                                         </p:tgtEl>
                                         <p:attrNameLst>
                                           <p:attrName>style.visibility</p:attrName>
@@ -8553,140 +9349,41 @@
                                     </p:set>
                                     <p:anim calcmode="lin" valueType="num">
                                       <p:cBhvr additive="base">
-                                        <p:cTn id="13" dur="420" fill="hold"/>
-                                        <p:tgtEl>
-                                          <p:spTgt spid="4"/>
-                                        </p:tgtEl>
-                                        <p:attrNameLst>
-                                          <p:attrName>ppt_w</p:attrName>
+                                        <p:cTn id="18" dur="550" fill="hold"/>
+                                        <p:tgtEl>
+                                          <p:spTgt spid="5"/>
+                                        </p:tgtEl>
+                                        <p:attrNameLst>
+                                          <p:attrName>ppt_x</p:attrName>
                                         </p:attrNameLst>
                                       </p:cBhvr>
                                       <p:tavLst>
                                         <p:tav tm="0">
                                           <p:val>
-                                            <p:strVal val="0"/>
+                                            <p:strVal val="#ppt_x"/>
                                           </p:val>
                                         </p:tav>
                                         <p:tav tm="100000">
                                           <p:val>
-                                            <p:strVal val="#ppt_w"/>
+                                            <p:strVal val="#ppt_x"/>
                                           </p:val>
                                         </p:tav>
                                       </p:tavLst>
                                     </p:anim>
                                     <p:anim calcmode="lin" valueType="num">
                                       <p:cBhvr additive="base">
-                                        <p:cTn id="14" dur="420" fill="hold"/>
-                                        <p:tgtEl>
-                                          <p:spTgt spid="4"/>
-                                        </p:tgtEl>
-                                        <p:attrNameLst>
-                                          <p:attrName>ppt_h</p:attrName>
+                                        <p:cTn id="19" dur="550" fill="hold"/>
+                                        <p:tgtEl>
+                                          <p:spTgt spid="5"/>
+                                        </p:tgtEl>
+                                        <p:attrNameLst>
+                                          <p:attrName>ppt_y</p:attrName>
                                         </p:attrNameLst>
                                       </p:cBhvr>
                                       <p:tavLst>
                                         <p:tav tm="0">
                                           <p:val>
-                                            <p:strVal val="0"/>
-                                          </p:val>
-                                        </p:tav>
-                                        <p:tav tm="100000">
-                                          <p:val>
-                                            <p:strVal val="#ppt_h"/>
-                                          </p:val>
-                                        </p:tav>
-                                      </p:tavLst>
-                                    </p:anim>
-                                    <p:animEffect transition="in" filter="fade">
-                                      <p:cBhvr>
-                                        <p:cTn id="15" dur="420"/>
-                                        <p:tgtEl>
-                                          <p:spTgt spid="4"/>
-                                        </p:tgtEl>
-                                      </p:cBhvr>
-                                    </p:animEffect>
-                                  </p:childTnLst>
-                                </p:cTn>
-                              </p:par>
-                            </p:childTnLst>
-                          </p:cTn>
-                        </p:par>
-                      </p:childTnLst>
-                    </p:cTn>
-                  </p:par>
-                  <p:par>
-                    <p:cTn id="16" fill="hold">
-                      <p:stCondLst>
-                        <p:cond delay="indefinite"/>
-                      </p:stCondLst>
-                      <p:childTnLst>
-                        <p:par>
-                          <p:cTn id="17" fill="hold">
-                            <p:stCondLst>
-                              <p:cond delay="0"/>
-                            </p:stCondLst>
-                            <p:childTnLst>
-                              <p:par>
-                                <p:cTn id="18" presetID="2" presetClass="entr" presetSubtype="8" fill="hold" decel="100000" grpId="0" nodeType="clickEffect">
-                                  <p:stCondLst>
-                                    <p:cond delay="0"/>
-                                  </p:stCondLst>
-                                  <p:childTnLst>
-                                    <p:set>
-                                      <p:cBhvr>
-                                        <p:cTn id="19" dur="1" fill="hold">
-                                          <p:stCondLst>
-                                            <p:cond delay="0"/>
-                                          </p:stCondLst>
-                                        </p:cTn>
-                                        <p:tgtEl>
-                                          <p:spTgt spid="5"/>
-                                        </p:tgtEl>
-                                        <p:attrNameLst>
-                                          <p:attrName>style.visibility</p:attrName>
-                                        </p:attrNameLst>
-                                      </p:cBhvr>
-                                      <p:to>
-                                        <p:strVal val="visible"/>
-                                      </p:to>
-                                    </p:set>
-                                    <p:anim calcmode="lin" valueType="num">
-                                      <p:cBhvr additive="base">
-                                        <p:cTn id="20" dur="550" fill="hold"/>
-                                        <p:tgtEl>
-                                          <p:spTgt spid="5"/>
-                                        </p:tgtEl>
-                                        <p:attrNameLst>
-                                          <p:attrName>ppt_x</p:attrName>
-                                        </p:attrNameLst>
-                                      </p:cBhvr>
-                                      <p:tavLst>
-                                        <p:tav tm="0">
-                                          <p:val>
-                                            <p:strVal val="0-#ppt_w/2"/>
-                                          </p:val>
-                                        </p:tav>
-                                        <p:tav tm="100000">
-                                          <p:val>
-                                            <p:strVal val="#ppt_x"/>
-                                          </p:val>
-                                        </p:tav>
-                                      </p:tavLst>
-                                    </p:anim>
-                                    <p:anim calcmode="lin" valueType="num">
-                                      <p:cBhvr additive="base">
-                                        <p:cTn id="21" dur="550" fill="hold"/>
-                                        <p:tgtEl>
-                                          <p:spTgt spid="5"/>
-                                        </p:tgtEl>
-                                        <p:attrNameLst>
-                                          <p:attrName>ppt_y</p:attrName>
-                                        </p:attrNameLst>
-                                      </p:cBhvr>
-                                      <p:tavLst>
-                                        <p:tav tm="0">
-                                          <p:val>
-                                            <p:strVal val="#ppt_y"/>
+                                            <p:strVal val="1+#ppt_h/2"/>
                                           </p:val>
                                         </p:tav>
                                         <p:tav tm="100000">
@@ -8706,26 +9403,26 @@
                     </p:cTn>
                   </p:par>
                   <p:par>
-                    <p:cTn id="22" fill="hold">
+                    <p:cTn id="20" fill="hold">
                       <p:stCondLst>
                         <p:cond delay="indefinite"/>
                       </p:stCondLst>
                       <p:childTnLst>
                         <p:par>
-                          <p:cTn id="23" fill="hold">
+                          <p:cTn id="21" fill="hold">
                             <p:stCondLst>
                               <p:cond delay="0"/>
                             </p:stCondLst>
                             <p:childTnLst>
                               <p:par>
-                                <p:cTn id="24" presetID="53" presetClass="entr" presetSubtype="16" fill="hold" grpId="0" nodeType="clickEffect">
+                                <p:cTn id="22" presetID="2" presetClass="entr" presetSubtype="4" fill="hold" decel="100000" grpId="0" nodeType="clickEffect">
                                   <p:stCondLst>
                                     <p:cond delay="0"/>
                                   </p:stCondLst>
                                   <p:childTnLst>
                                     <p:set>
                                       <p:cBhvr>
-                                        <p:cTn id="25" dur="1" fill="hold">
+                                        <p:cTn id="23" dur="1" fill="hold">
                                           <p:stCondLst>
                                             <p:cond delay="0"/>
                                           </p:stCondLst>
@@ -8743,248 +9440,50 @@
                                     </p:set>
                                     <p:anim calcmode="lin" valueType="num">
                                       <p:cBhvr additive="base">
-                                        <p:cTn id="26" dur="420" fill="hold"/>
+                                        <p:cTn id="24" dur="550" fill="hold"/>
                                         <p:tgtEl>
                                           <p:spTgt spid="6"/>
                                         </p:tgtEl>
                                         <p:attrNameLst>
-                                          <p:attrName>ppt_w</p:attrName>
+                                          <p:attrName>ppt_x</p:attrName>
                                         </p:attrNameLst>
                                       </p:cBhvr>
                                       <p:tavLst>
                                         <p:tav tm="0">
                                           <p:val>
-                                            <p:strVal val="0"/>
+                                            <p:strVal val="#ppt_x"/>
                                           </p:val>
                                         </p:tav>
                                         <p:tav tm="100000">
                                           <p:val>
-                                            <p:strVal val="#ppt_w"/>
+                                            <p:strVal val="#ppt_x"/>
                                           </p:val>
                                         </p:tav>
                                       </p:tavLst>
                                     </p:anim>
                                     <p:anim calcmode="lin" valueType="num">
                                       <p:cBhvr additive="base">
-                                        <p:cTn id="27" dur="420" fill="hold"/>
+                                        <p:cTn id="25" dur="550" fill="hold"/>
                                         <p:tgtEl>
                                           <p:spTgt spid="6"/>
                                         </p:tgtEl>
                                         <p:attrNameLst>
-                                          <p:attrName>ppt_h</p:attrName>
+                                          <p:attrName>ppt_y</p:attrName>
                                         </p:attrNameLst>
                                       </p:cBhvr>
                                       <p:tavLst>
                                         <p:tav tm="0">
                                           <p:val>
-                                            <p:strVal val="0"/>
+                                            <p:strVal val="1+#ppt_h/2"/>
                                           </p:val>
                                         </p:tav>
                                         <p:tav tm="100000">
                                           <p:val>
-                                            <p:strVal val="#ppt_h"/>
+                                            <p:strVal val="#ppt_y"/>
                                           </p:val>
                                         </p:tav>
                                       </p:tavLst>
                                     </p:anim>
-                                    <p:animEffect transition="in" filter="fade">
-                                      <p:cBhvr>
-                                        <p:cTn id="28" dur="420"/>
-                                        <p:tgtEl>
-                                          <p:spTgt spid="6"/>
-                                        </p:tgtEl>
-                                      </p:cBhvr>
-                                    </p:animEffect>
-                                  </p:childTnLst>
-                                </p:cTn>
-                              </p:par>
-                            </p:childTnLst>
-                          </p:cTn>
-                        </p:par>
-                      </p:childTnLst>
-                    </p:cTn>
-                  </p:par>
-                  <p:par>
-                    <p:cTn id="29" fill="hold">
-                      <p:stCondLst>
-                        <p:cond delay="indefinite"/>
-                      </p:stCondLst>
-                      <p:childTnLst>
-                        <p:par>
-                          <p:cTn id="30" fill="hold">
-                            <p:stCondLst>
-                              <p:cond delay="0"/>
-                            </p:stCondLst>
-                            <p:childTnLst>
-                              <p:par>
-                                <p:cTn id="31" presetID="2" presetClass="entr" presetSubtype="8" fill="hold" decel="100000" grpId="0" nodeType="clickEffect">
-                                  <p:stCondLst>
-                                    <p:cond delay="0"/>
-                                  </p:stCondLst>
-                                  <p:childTnLst>
-                                    <p:set>
-                                      <p:cBhvr>
-                                        <p:cTn id="32" dur="1" fill="hold">
-                                          <p:stCondLst>
-                                            <p:cond delay="0"/>
-                                          </p:stCondLst>
-                                        </p:cTn>
-                                        <p:tgtEl>
-                                          <p:spTgt spid="7"/>
-                                        </p:tgtEl>
-                                        <p:attrNameLst>
-                                          <p:attrName>style.visibility</p:attrName>
-                                        </p:attrNameLst>
-                                      </p:cBhvr>
-                                      <p:to>
-                                        <p:strVal val="visible"/>
-                                      </p:to>
-                                    </p:set>
-                                    <p:anim calcmode="lin" valueType="num">
-                                      <p:cBhvr additive="base">
-                                        <p:cTn id="33" dur="550" fill="hold"/>
-                                        <p:tgtEl>
-                                          <p:spTgt spid="7"/>
-                                        </p:tgtEl>
-                                        <p:attrNameLst>
-                                          <p:attrName>ppt_x</p:attrName>
-                                        </p:attrNameLst>
-                                      </p:cBhvr>
-                                      <p:tavLst>
-                                        <p:tav tm="0">
-                                          <p:val>
-                                            <p:strVal val="0-#ppt_w/2"/>
-                                          </p:val>
-                                        </p:tav>
-                                        <p:tav tm="100000">
-                                          <p:val>
-                                            <p:strVal val="#ppt_x"/>
-                                          </p:val>
-                                        </p:tav>
-                                      </p:tavLst>
-                                    </p:anim>
-                                    <p:anim calcmode="lin" valueType="num">
-                                      <p:cBhvr additive="base">
-                                        <p:cTn id="34" dur="550" fill="hold"/>
-                                        <p:tgtEl>
-                                          <p:spTgt spid="7"/>
-                                        </p:tgtEl>
-                                        <p:attrNameLst>
-                                          <p:attrName>ppt_y</p:attrName>
-                                        </p:attrNameLst>
-                                      </p:cBhvr>
-                                      <p:tavLst>
-                                        <p:tav tm="0">
-                                          <p:val>
-                                            <p:strVal val="#ppt_y"/>
-                                          </p:val>
-                                        </p:tav>
-                                        <p:tav tm="100000">
-                                          <p:val>
-                                            <p:strVal val="#ppt_y"/>
-                                          </p:val>
-                                        </p:tav>
-                                      </p:tavLst>
-                                    </p:anim>
-                                  </p:childTnLst>
-                                </p:cTn>
-                              </p:par>
-                            </p:childTnLst>
-                          </p:cTn>
-                        </p:par>
-                      </p:childTnLst>
-                    </p:cTn>
-                  </p:par>
-                  <p:par>
-                    <p:cTn id="35" fill="hold">
-                      <p:stCondLst>
-                        <p:cond delay="indefinite"/>
-                      </p:stCondLst>
-                      <p:childTnLst>
-                        <p:par>
-                          <p:cTn id="36" fill="hold">
-                            <p:stCondLst>
-                              <p:cond delay="0"/>
-                            </p:stCondLst>
-                            <p:childTnLst>
-                              <p:par>
-                                <p:cTn id="37" presetID="53" presetClass="entr" presetSubtype="16" fill="hold" grpId="0" nodeType="clickEffect">
-                                  <p:stCondLst>
-                                    <p:cond delay="0"/>
-                                  </p:stCondLst>
-                                  <p:childTnLst>
-                                    <p:set>
-                                      <p:cBhvr>
-                                        <p:cTn id="38" dur="1" fill="hold">
-                                          <p:stCondLst>
-                                            <p:cond delay="0"/>
-                                          </p:stCondLst>
-                                        </p:cTn>
-                                        <p:tgtEl>
-                                          <p:spTgt spid="8"/>
-                                        </p:tgtEl>
-                                        <p:attrNameLst>
-                                          <p:attrName>style.visibility</p:attrName>
-                                        </p:attrNameLst>
-                                      </p:cBhvr>
-                                      <p:to>
-                                        <p:strVal val="visible"/>
-                                      </p:to>
-                                    </p:set>
-                                    <p:anim calcmode="lin" valueType="num">
-                                      <p:cBhvr additive="base">
-                                        <p:cTn id="39" dur="420" fill="hold"/>
-                                        <p:tgtEl>
-                                          <p:spTgt spid="8"/>
-                                        </p:tgtEl>
-                                        <p:attrNameLst>
-                                          <p:attrName>ppt_w</p:attrName>
-                                        </p:attrNameLst>
-                                      </p:cBhvr>
-                                      <p:tavLst>
-                                        <p:tav tm="0">
-                                          <p:val>
-                                            <p:strVal val="0"/>
-                                          </p:val>
-                                        </p:tav>
-                                        <p:tav tm="100000">
-                                          <p:val>
-                                            <p:strVal val="#ppt_w"/>
-                                          </p:val>
-                                        </p:tav>
-                                      </p:tavLst>
-                                    </p:anim>
-                                    <p:anim calcmode="lin" valueType="num">
-                                      <p:cBhvr additive="base">
-                                        <p:cTn id="40" dur="420" fill="hold"/>
-                                        <p:tgtEl>
-                                          <p:spTgt spid="8"/>
-                                        </p:tgtEl>
-                                        <p:attrNameLst>
-                                          <p:attrName>ppt_h</p:attrName>
-                                        </p:attrNameLst>
-                                      </p:cBhvr>
-                                      <p:tavLst>
-                                        <p:tav tm="0">
-                                          <p:val>
-                                            <p:strVal val="0"/>
-                                          </p:val>
-                                        </p:tav>
-                                        <p:tav tm="100000">
-                                          <p:val>
-                                            <p:strVal val="#ppt_h"/>
-                                          </p:val>
-                                        </p:tav>
-                                      </p:tavLst>
-                                    </p:anim>
-                                    <p:animEffect transition="in" filter="fade">
-                                      <p:cBhvr>
-                                        <p:cTn id="41" dur="420"/>
-                                        <p:tgtEl>
-                                          <p:spTgt spid="8"/>
-                                        </p:tgtEl>
-                                      </p:cBhvr>
-                                    </p:animEffect>
                                   </p:childTnLst>
                                 </p:cTn>
                               </p:par>
